--- a/~sasano/lecture/fpl/26/fpl9.pptx
+++ b/~sasano/lecture/fpl/26/fpl9.pptx
@@ -232,7 +232,7 @@
             <a:fld id="{CD3D9CFB-0975-45A5-A4EB-427654E76663}" type="datetimeFigureOut">
               <a:rPr kumimoji="1" lang="ja-JP" altLang="en-US" smtClean="0"/>
               <a:pPr/>
-              <a:t>2023/11/20</a:t>
+              <a:t>2026/9/30</a:t>
             </a:fld>
             <a:endParaRPr kumimoji="1" lang="ja-JP" altLang="en-US"/>
           </a:p>
@@ -2652,7 +2652,7 @@
             <a:fld id="{E90ED720-0104-4369-84BC-D37694168613}" type="datetimeFigureOut">
               <a:rPr kumimoji="1" lang="ja-JP" altLang="en-US" smtClean="0"/>
               <a:pPr/>
-              <a:t>2023/11/20</a:t>
+              <a:t>2026/9/30</a:t>
             </a:fld>
             <a:endParaRPr kumimoji="1" lang="ja-JP" altLang="en-US"/>
           </a:p>
@@ -2849,7 +2849,7 @@
             <a:fld id="{E90ED720-0104-4369-84BC-D37694168613}" type="datetimeFigureOut">
               <a:rPr kumimoji="1" lang="ja-JP" altLang="en-US" smtClean="0"/>
               <a:pPr/>
-              <a:t>2023/11/20</a:t>
+              <a:t>2026/9/30</a:t>
             </a:fld>
             <a:endParaRPr kumimoji="1" lang="ja-JP" altLang="en-US"/>
           </a:p>
@@ -3056,7 +3056,7 @@
             <a:fld id="{E90ED720-0104-4369-84BC-D37694168613}" type="datetimeFigureOut">
               <a:rPr kumimoji="1" lang="ja-JP" altLang="en-US" smtClean="0"/>
               <a:pPr/>
-              <a:t>2023/11/20</a:t>
+              <a:t>2026/9/30</a:t>
             </a:fld>
             <a:endParaRPr kumimoji="1" lang="ja-JP" altLang="en-US"/>
           </a:p>
@@ -3253,7 +3253,7 @@
             <a:fld id="{E90ED720-0104-4369-84BC-D37694168613}" type="datetimeFigureOut">
               <a:rPr kumimoji="1" lang="ja-JP" altLang="en-US" smtClean="0"/>
               <a:pPr/>
-              <a:t>2023/11/20</a:t>
+              <a:t>2026/9/30</a:t>
             </a:fld>
             <a:endParaRPr kumimoji="1" lang="ja-JP" altLang="en-US"/>
           </a:p>
@@ -3495,7 +3495,7 @@
             <a:fld id="{E90ED720-0104-4369-84BC-D37694168613}" type="datetimeFigureOut">
               <a:rPr kumimoji="1" lang="ja-JP" altLang="en-US" smtClean="0"/>
               <a:pPr/>
-              <a:t>2023/11/20</a:t>
+              <a:t>2026/9/30</a:t>
             </a:fld>
             <a:endParaRPr kumimoji="1" lang="ja-JP" altLang="en-US"/>
           </a:p>
@@ -3841,7 +3841,7 @@
             <a:fld id="{E90ED720-0104-4369-84BC-D37694168613}" type="datetimeFigureOut">
               <a:rPr kumimoji="1" lang="ja-JP" altLang="en-US" smtClean="0"/>
               <a:pPr/>
-              <a:t>2023/11/20</a:t>
+              <a:t>2026/9/30</a:t>
             </a:fld>
             <a:endParaRPr kumimoji="1" lang="ja-JP" altLang="en-US"/>
           </a:p>
@@ -4321,7 +4321,7 @@
             <a:fld id="{E90ED720-0104-4369-84BC-D37694168613}" type="datetimeFigureOut">
               <a:rPr kumimoji="1" lang="ja-JP" altLang="en-US" smtClean="0"/>
               <a:pPr/>
-              <a:t>2023/11/20</a:t>
+              <a:t>2026/9/30</a:t>
             </a:fld>
             <a:endParaRPr kumimoji="1" lang="ja-JP" altLang="en-US"/>
           </a:p>
@@ -4435,7 +4435,7 @@
             <a:fld id="{E90ED720-0104-4369-84BC-D37694168613}" type="datetimeFigureOut">
               <a:rPr kumimoji="1" lang="ja-JP" altLang="en-US" smtClean="0"/>
               <a:pPr/>
-              <a:t>2023/11/20</a:t>
+              <a:t>2026/9/30</a:t>
             </a:fld>
             <a:endParaRPr kumimoji="1" lang="ja-JP" altLang="en-US"/>
           </a:p>
@@ -4527,7 +4527,7 @@
             <a:fld id="{E90ED720-0104-4369-84BC-D37694168613}" type="datetimeFigureOut">
               <a:rPr kumimoji="1" lang="ja-JP" altLang="en-US" smtClean="0"/>
               <a:pPr/>
-              <a:t>2023/11/20</a:t>
+              <a:t>2026/9/30</a:t>
             </a:fld>
             <a:endParaRPr kumimoji="1" lang="ja-JP" altLang="en-US"/>
           </a:p>
@@ -4831,7 +4831,7 @@
             <a:fld id="{E90ED720-0104-4369-84BC-D37694168613}" type="datetimeFigureOut">
               <a:rPr kumimoji="1" lang="ja-JP" altLang="en-US" smtClean="0"/>
               <a:pPr/>
-              <a:t>2023/11/20</a:t>
+              <a:t>2026/9/30</a:t>
             </a:fld>
             <a:endParaRPr kumimoji="1" lang="ja-JP" altLang="en-US"/>
           </a:p>
@@ -5080,7 +5080,7 @@
             <a:fld id="{E90ED720-0104-4369-84BC-D37694168613}" type="datetimeFigureOut">
               <a:rPr kumimoji="1" lang="ja-JP" altLang="en-US" smtClean="0"/>
               <a:pPr/>
-              <a:t>2023/11/20</a:t>
+              <a:t>2026/9/30</a:t>
             </a:fld>
             <a:endParaRPr kumimoji="1" lang="ja-JP" altLang="en-US"/>
           </a:p>
@@ -5320,7 +5320,7 @@
             <a:fld id="{E90ED720-0104-4369-84BC-D37694168613}" type="datetimeFigureOut">
               <a:rPr kumimoji="1" lang="ja-JP" altLang="en-US" smtClean="0"/>
               <a:pPr/>
-              <a:t>2023/11/20</a:t>
+              <a:t>2026/9/30</a:t>
             </a:fld>
             <a:endParaRPr kumimoji="1" lang="ja-JP" altLang="en-US"/>
           </a:p>
@@ -5770,56 +5770,6 @@
                 <a:schemeClr val="tx1"/>
               </a:solidFill>
             </a:endParaRPr>
-          </a:p>
-        </p:txBody>
-      </p:sp>
-      <p:sp>
-        <p:nvSpPr>
-          <p:cNvPr id="7" name="テキスト ボックス 6"/>
-          <p:cNvSpPr txBox="1"/>
-          <p:nvPr/>
-        </p:nvSpPr>
-        <p:spPr>
-          <a:xfrm>
-            <a:off x="755576" y="4365104"/>
-            <a:ext cx="7776863" cy="1077218"/>
-          </a:xfrm>
-          <a:prstGeom prst="rect">
-            <a:avLst/>
-          </a:prstGeom>
-          <a:noFill/>
-        </p:spPr>
-        <p:txBody>
-          <a:bodyPr wrap="square" rtlCol="0">
-            <a:spAutoFit/>
-          </a:bodyPr>
-          <a:lstStyle/>
-          <a:p>
-            <a:pPr algn="ctr"/>
-            <a:r>
-              <a:rPr kumimoji="1" lang="en-US" altLang="ja-JP" sz="3200" b="0" dirty="0"/>
-              <a:t>Department of </a:t>
-            </a:r>
-          </a:p>
-          <a:p>
-            <a:pPr algn="ctr"/>
-            <a:r>
-              <a:rPr lang="en-US" altLang="ja-JP" sz="3200" dirty="0"/>
-              <a:t>Computer</a:t>
-            </a:r>
-            <a:r>
-              <a:rPr kumimoji="1" lang="en-US" altLang="ja-JP" sz="3200" b="0" dirty="0"/>
-              <a:t> Science and </a:t>
-            </a:r>
-            <a:r>
-              <a:rPr lang="en-US" altLang="ja-JP" sz="3200" b="0" dirty="0"/>
-              <a:t>Engineering</a:t>
-            </a:r>
-            <a:r>
-              <a:rPr kumimoji="1" lang="en-US" altLang="ja-JP" sz="3200" b="0" dirty="0"/>
-              <a:t> </a:t>
-            </a:r>
-            <a:endParaRPr kumimoji="1" lang="ja-JP" altLang="en-US" sz="3200" b="0" dirty="0"/>
           </a:p>
         </p:txBody>
       </p:sp>
